--- a/deep_learning/3_RNN_NLP/2_NLP_2_Detailed/1_NLP-Types-of-data.pptx
+++ b/deep_learning/3_RNN_NLP/2_NLP_2_Detailed/1_NLP-Types-of-data.pptx
@@ -7233,7 +7233,7 @@
           <a:p>
             <a:fld id="{7BAEECA8-D063-486F-AE31-5020270C1449}" type="datetimeFigureOut">
               <a:rPr lang="en-US" smtClean="0"/>
-              <a:t>4/19/2026</a:t>
+              <a:t>7/19/2026</a:t>
             </a:fld>
             <a:endParaRPr lang="en-US"/>
           </a:p>
@@ -7410,7 +7410,7 @@
           <a:p>
             <a:fld id="{CB233BD1-3BA8-448D-9D08-7846095EA517}" type="datetimeFigureOut">
               <a:rPr lang="en-US" smtClean="0"/>
-              <a:t>4/19/2026</a:t>
+              <a:t>7/19/2026</a:t>
             </a:fld>
             <a:endParaRPr lang="en-US"/>
           </a:p>
@@ -7824,7 +7824,7 @@
           <a:p>
             <a:fld id="{6383FAE1-13DE-4511-8C1B-C8AFB720664C}" type="datetimeFigureOut">
               <a:rPr lang="en-US" smtClean="0"/>
-              <a:t>4/19/2026</a:t>
+              <a:t>7/19/2026</a:t>
             </a:fld>
             <a:endParaRPr lang="en-US"/>
           </a:p>
@@ -8022,7 +8022,7 @@
           <a:p>
             <a:fld id="{6383FAE1-13DE-4511-8C1B-C8AFB720664C}" type="datetimeFigureOut">
               <a:rPr lang="en-US" smtClean="0"/>
-              <a:t>4/19/2026</a:t>
+              <a:t>7/19/2026</a:t>
             </a:fld>
             <a:endParaRPr lang="en-US"/>
           </a:p>
@@ -8230,7 +8230,7 @@
           <a:p>
             <a:fld id="{6383FAE1-13DE-4511-8C1B-C8AFB720664C}" type="datetimeFigureOut">
               <a:rPr lang="en-US" smtClean="0"/>
-              <a:t>4/19/2026</a:t>
+              <a:t>7/19/2026</a:t>
             </a:fld>
             <a:endParaRPr lang="en-US"/>
           </a:p>
@@ -8428,7 +8428,7 @@
           <a:p>
             <a:fld id="{6383FAE1-13DE-4511-8C1B-C8AFB720664C}" type="datetimeFigureOut">
               <a:rPr lang="en-US" smtClean="0"/>
-              <a:t>4/19/2026</a:t>
+              <a:t>7/19/2026</a:t>
             </a:fld>
             <a:endParaRPr lang="en-US"/>
           </a:p>
@@ -8703,7 +8703,7 @@
           <a:p>
             <a:fld id="{6383FAE1-13DE-4511-8C1B-C8AFB720664C}" type="datetimeFigureOut">
               <a:rPr lang="en-US" smtClean="0"/>
-              <a:t>4/19/2026</a:t>
+              <a:t>7/19/2026</a:t>
             </a:fld>
             <a:endParaRPr lang="en-US"/>
           </a:p>
@@ -8968,7 +8968,7 @@
           <a:p>
             <a:fld id="{6383FAE1-13DE-4511-8C1B-C8AFB720664C}" type="datetimeFigureOut">
               <a:rPr lang="en-US" smtClean="0"/>
-              <a:t>4/19/2026</a:t>
+              <a:t>7/19/2026</a:t>
             </a:fld>
             <a:endParaRPr lang="en-US"/>
           </a:p>
@@ -9380,7 +9380,7 @@
           <a:p>
             <a:fld id="{6383FAE1-13DE-4511-8C1B-C8AFB720664C}" type="datetimeFigureOut">
               <a:rPr lang="en-US" smtClean="0"/>
-              <a:t>4/19/2026</a:t>
+              <a:t>7/19/2026</a:t>
             </a:fld>
             <a:endParaRPr lang="en-US"/>
           </a:p>
@@ -9521,7 +9521,7 @@
           <a:p>
             <a:fld id="{6383FAE1-13DE-4511-8C1B-C8AFB720664C}" type="datetimeFigureOut">
               <a:rPr lang="en-US" smtClean="0"/>
-              <a:t>4/19/2026</a:t>
+              <a:t>7/19/2026</a:t>
             </a:fld>
             <a:endParaRPr lang="en-US"/>
           </a:p>
@@ -9634,7 +9634,7 @@
           <a:p>
             <a:fld id="{6383FAE1-13DE-4511-8C1B-C8AFB720664C}" type="datetimeFigureOut">
               <a:rPr lang="en-US" smtClean="0"/>
-              <a:t>4/19/2026</a:t>
+              <a:t>7/19/2026</a:t>
             </a:fld>
             <a:endParaRPr lang="en-US"/>
           </a:p>
@@ -9945,7 +9945,7 @@
           <a:p>
             <a:fld id="{6383FAE1-13DE-4511-8C1B-C8AFB720664C}" type="datetimeFigureOut">
               <a:rPr lang="en-US" smtClean="0"/>
-              <a:t>4/19/2026</a:t>
+              <a:t>7/19/2026</a:t>
             </a:fld>
             <a:endParaRPr lang="en-US"/>
           </a:p>
@@ -10236,7 +10236,7 @@
           <a:p>
             <a:fld id="{6383FAE1-13DE-4511-8C1B-C8AFB720664C}" type="datetimeFigureOut">
               <a:rPr lang="en-US" smtClean="0"/>
-              <a:t>4/19/2026</a:t>
+              <a:t>7/19/2026</a:t>
             </a:fld>
             <a:endParaRPr lang="en-US"/>
           </a:p>
@@ -10480,7 +10480,7 @@
           <a:p>
             <a:fld id="{6383FAE1-13DE-4511-8C1B-C8AFB720664C}" type="datetimeFigureOut">
               <a:rPr lang="en-US" smtClean="0"/>
-              <a:t>4/19/2026</a:t>
+              <a:t>7/19/2026</a:t>
             </a:fld>
             <a:endParaRPr lang="en-US"/>
           </a:p>
@@ -11344,7 +11344,7 @@
                   </a:schemeClr>
                 </a:solidFill>
               </a:rPr>
-              <a:t>Emails, social media posts, documents like Word files or PDFs, Wikipedia etc.</a:t>
+              <a:t>Examples: emails, social media posts, documents like Word files or PDFs, Wikipedia, etc.</a:t>
             </a:r>
           </a:p>
           <a:p>
@@ -11528,13 +11528,13 @@
   <p:clrMapOvr>
     <a:masterClrMapping/>
   </p:clrMapOvr>
-  <mc:AlternateContent xmlns:mc="http://schemas.openxmlformats.org/markup-compatibility/2006">
-    <mc:Choice xmlns:p14="http://schemas.microsoft.com/office/powerpoint/2010/main" Requires="p14">
+  <mc:AlternateContent xmlns:mc="http://schemas.openxmlformats.org/markup-compatibility/2006" xmlns:p14="http://schemas.microsoft.com/office/powerpoint/2010/main">
+    <mc:Choice Requires="p14">
       <p:transition spd="med" p14:dur="700">
         <p:fade/>
       </p:transition>
     </mc:Choice>
-    <mc:Fallback>
+    <mc:Fallback xmlns="">
       <p:transition spd="med">
         <p:fade/>
       </p:transition>
@@ -11580,8 +11580,8 @@
         </p:nvSpPr>
         <p:spPr>
           <a:xfrm>
-            <a:off x="661416" y="1690717"/>
-            <a:ext cx="8766048" cy="3083921"/>
+            <a:off x="107887" y="1196941"/>
+            <a:ext cx="8766048" cy="2419124"/>
           </a:xfrm>
           <a:prstGeom prst="rect">
             <a:avLst/>
@@ -11598,43 +11598,6 @@
             <a:spAutoFit/>
           </a:bodyPr>
           <a:lstStyle/>
-          <a:p>
-            <a:pPr marL="342900" indent="-342900">
-              <a:lnSpc>
-                <a:spcPct val="90000"/>
-              </a:lnSpc>
-              <a:buFont typeface="Arial" panose="020B0604020202020204" pitchFamily="34" charset="0"/>
-              <a:buChar char="•"/>
-            </a:pPr>
-            <a:r>
-              <a:rPr lang="en-US" sz="2400" dirty="0">
-                <a:solidFill>
-                  <a:schemeClr val="accent6">
-                    <a:lumMod val="60000"/>
-                    <a:lumOff val="40000"/>
-                  </a:schemeClr>
-                </a:solidFill>
-              </a:rPr>
-              <a:t>Text data with inconsistent formats. </a:t>
-            </a:r>
-          </a:p>
-          <a:p>
-            <a:pPr marL="342900" indent="-342900">
-              <a:lnSpc>
-                <a:spcPct val="90000"/>
-              </a:lnSpc>
-              <a:buFont typeface="Arial" panose="020B0604020202020204" pitchFamily="34" charset="0"/>
-              <a:buChar char="•"/>
-            </a:pPr>
-            <a:endParaRPr lang="en-US" sz="2400" dirty="0">
-              <a:solidFill>
-                <a:schemeClr val="accent6">
-                  <a:lumMod val="60000"/>
-                  <a:lumOff val="40000"/>
-                </a:schemeClr>
-              </a:solidFill>
-            </a:endParaRPr>
-          </a:p>
           <a:p>
             <a:pPr marL="342900" indent="-342900">
               <a:lnSpc>
@@ -11813,7 +11776,7 @@
         </p:nvGrpSpPr>
         <p:grpSpPr>
           <a:xfrm>
-            <a:off x="729679" y="284067"/>
+            <a:off x="107887" y="101187"/>
             <a:ext cx="3266250" cy="876617"/>
             <a:chOff x="2125617" y="1660845"/>
             <a:chExt cx="1753234" cy="876617"/>
@@ -11931,6 +11894,36 @@
           </p:txBody>
         </p:sp>
       </p:grpSp>
+      <p:pic>
+        <p:nvPicPr>
+          <p:cNvPr id="6" name="Picture 5">
+            <a:extLst>
+              <a:ext uri="{FF2B5EF4-FFF2-40B4-BE49-F238E27FC236}">
+                <a16:creationId xmlns:a16="http://schemas.microsoft.com/office/drawing/2014/main" id="{076E8EF6-265B-DCD8-AB2E-B4B28708E194}"/>
+              </a:ext>
+            </a:extLst>
+          </p:cNvPr>
+          <p:cNvPicPr>
+            <a:picLocks noChangeAspect="1"/>
+          </p:cNvPicPr>
+          <p:nvPr/>
+        </p:nvPicPr>
+        <p:blipFill>
+          <a:blip r:embed="rId2"/>
+          <a:stretch>
+            <a:fillRect/>
+          </a:stretch>
+        </p:blipFill>
+        <p:spPr>
+          <a:xfrm>
+            <a:off x="4909845" y="3493008"/>
+            <a:ext cx="7186687" cy="3254661"/>
+          </a:xfrm>
+          <a:prstGeom prst="rect">
+            <a:avLst/>
+          </a:prstGeom>
+        </p:spPr>
+      </p:pic>
     </p:spTree>
     <p:extLst>
       <p:ext uri="{BB962C8B-B14F-4D97-AF65-F5344CB8AC3E}">
@@ -11941,13 +11934,13 @@
   <p:clrMapOvr>
     <a:masterClrMapping/>
   </p:clrMapOvr>
-  <mc:AlternateContent xmlns:mc="http://schemas.openxmlformats.org/markup-compatibility/2006">
-    <mc:Choice xmlns:p14="http://schemas.microsoft.com/office/powerpoint/2010/main" Requires="p14">
+  <mc:AlternateContent xmlns:mc="http://schemas.openxmlformats.org/markup-compatibility/2006" xmlns:p14="http://schemas.microsoft.com/office/powerpoint/2010/main">
+    <mc:Choice Requires="p14">
       <p:transition spd="med" p14:dur="700">
         <p:fade/>
       </p:transition>
     </mc:Choice>
-    <mc:Fallback>
+    <mc:Fallback xmlns="">
       <p:transition spd="med">
         <p:fade/>
       </p:transition>
@@ -12425,13 +12418,13 @@
   <p:clrMapOvr>
     <a:masterClrMapping/>
   </p:clrMapOvr>
-  <mc:AlternateContent xmlns:mc="http://schemas.openxmlformats.org/markup-compatibility/2006">
-    <mc:Choice xmlns:p14="http://schemas.microsoft.com/office/powerpoint/2010/main" Requires="p14">
+  <mc:AlternateContent xmlns:mc="http://schemas.openxmlformats.org/markup-compatibility/2006" xmlns:p14="http://schemas.microsoft.com/office/powerpoint/2010/main">
+    <mc:Choice Requires="p14">
       <p:transition spd="med" p14:dur="700">
         <p:fade/>
       </p:transition>
     </mc:Choice>
-    <mc:Fallback>
+    <mc:Fallback xmlns="">
       <p:transition spd="med">
         <p:fade/>
       </p:transition>
@@ -12478,7 +12471,7 @@
         <p:spPr>
           <a:xfrm>
             <a:off x="472866" y="1793375"/>
-            <a:ext cx="9283782" cy="1754326"/>
+            <a:ext cx="9283782" cy="1421928"/>
           </a:xfrm>
           <a:prstGeom prst="rect">
             <a:avLst/>
@@ -12572,25 +12565,8 @@
                   </a:schemeClr>
                 </a:solidFill>
               </a:rPr>
-              <a:t>&lt;10% available data is unstructured.</a:t>
+              <a:t>&lt; 10% available data is unstructured.</a:t>
             </a:r>
-          </a:p>
-          <a:p>
-            <a:pPr marL="342900" indent="-342900">
-              <a:lnSpc>
-                <a:spcPct val="90000"/>
-              </a:lnSpc>
-              <a:buFont typeface="Arial" panose="020B0604020202020204" pitchFamily="34" charset="0"/>
-              <a:buChar char="•"/>
-            </a:pPr>
-            <a:endParaRPr lang="en-IN" sz="2400" dirty="0">
-              <a:solidFill>
-                <a:schemeClr val="accent6">
-                  <a:lumMod val="60000"/>
-                  <a:lumOff val="40000"/>
-                </a:schemeClr>
-              </a:solidFill>
-            </a:endParaRPr>
           </a:p>
         </p:txBody>
       </p:sp>
@@ -12608,7 +12584,7 @@
         </p:nvGrpSpPr>
         <p:grpSpPr>
           <a:xfrm>
-            <a:off x="802830" y="293211"/>
+            <a:off x="153606" y="183483"/>
             <a:ext cx="2991929" cy="876617"/>
             <a:chOff x="6368445" y="1660845"/>
             <a:chExt cx="1753234" cy="876617"/>
@@ -12726,6 +12702,36 @@
           </p:txBody>
         </p:sp>
       </p:grpSp>
+      <p:pic>
+        <p:nvPicPr>
+          <p:cNvPr id="6" name="Picture 5">
+            <a:extLst>
+              <a:ext uri="{FF2B5EF4-FFF2-40B4-BE49-F238E27FC236}">
+                <a16:creationId xmlns:a16="http://schemas.microsoft.com/office/drawing/2014/main" id="{C43BE2B0-022A-2679-2F43-3FE5071B9413}"/>
+              </a:ext>
+            </a:extLst>
+          </p:cNvPr>
+          <p:cNvPicPr>
+            <a:picLocks noChangeAspect="1"/>
+          </p:cNvPicPr>
+          <p:nvPr/>
+        </p:nvPicPr>
+        <p:blipFill>
+          <a:blip r:embed="rId2"/>
+          <a:stretch>
+            <a:fillRect/>
+          </a:stretch>
+        </p:blipFill>
+        <p:spPr>
+          <a:xfrm>
+            <a:off x="6430838" y="3642698"/>
+            <a:ext cx="3878281" cy="2026582"/>
+          </a:xfrm>
+          <a:prstGeom prst="rect">
+            <a:avLst/>
+          </a:prstGeom>
+        </p:spPr>
+      </p:pic>
     </p:spTree>
     <p:extLst>
       <p:ext uri="{BB962C8B-B14F-4D97-AF65-F5344CB8AC3E}">
@@ -12736,13 +12742,13 @@
   <p:clrMapOvr>
     <a:masterClrMapping/>
   </p:clrMapOvr>
-  <mc:AlternateContent xmlns:mc="http://schemas.openxmlformats.org/markup-compatibility/2006">
-    <mc:Choice xmlns:p14="http://schemas.microsoft.com/office/powerpoint/2010/main" Requires="p14">
+  <mc:AlternateContent xmlns:mc="http://schemas.openxmlformats.org/markup-compatibility/2006" xmlns:p14="http://schemas.microsoft.com/office/powerpoint/2010/main">
+    <mc:Choice Requires="p14">
       <p:transition spd="med" p14:dur="700">
         <p:fade/>
       </p:transition>
     </mc:Choice>
-    <mc:Fallback>
+    <mc:Fallback xmlns="">
       <p:transition spd="med">
         <p:fade/>
       </p:transition>
